--- a/Задание_10_IP_адресация/Презентация/N10. Маска подсети. Презентация.pptx
+++ b/Задание_10_IP_адресация/Презентация/N10. Маска подсети. Презентация.pptx
@@ -5738,7 +5738,7 @@
                 </a:solidFill>
                 <a:latin typeface="Arial"/>
               </a:rPr>
-              <a:t>Лилия Шарф</a:t>
+              <a:t>Шарф Л.</a:t>
             </a:r>
           </a:p>
         </p:txBody>
@@ -5801,7 +5801,7 @@
                 </a:solidFill>
                 <a:latin typeface="Arial"/>
               </a:rPr>
-              <a:t>ЕГЭ информатика · №10. IP-адресация и маска подсети</a:t>
+              <a:t>№10. IP-адресация и маска подсети</a:t>
             </a:r>
           </a:p>
         </p:txBody>
@@ -5933,7 +5933,7 @@
                 </a:solidFill>
                 <a:latin typeface="Arial"/>
               </a:rPr>
-              <a:t>Задание №10 · ЕГЭ по информатике 2027</a:t>
+              <a:t>Задание №10. ЕГЭ по информатике 2027</a:t>
             </a:r>
           </a:p>
         </p:txBody>
@@ -5978,7 +5978,7 @@
                 </a:solidFill>
                 <a:latin typeface="Arial"/>
               </a:rPr>
-              <a:t>Лилия Шарф</a:t>
+              <a:t>Шарф Лилия</a:t>
             </a:r>
           </a:p>
           <a:p>
@@ -6001,28 +6001,6 @@
                 <a:latin typeface="Arial"/>
               </a:rPr>
               <a:t>Подготовительные курсы СПбПУ</a:t>
-            </a:r>
-          </a:p>
-          <a:p>
-            <a:pPr algn="ctr">
-              <a:lnSpc>
-                <a:spcPct val="100000"/>
-              </a:lnSpc>
-              <a:spcBef>
-                <a:spcPts val="0"/>
-              </a:spcBef>
-              <a:spcAft>
-                <a:spcPts val="1000"/>
-              </a:spcAft>
-            </a:pPr>
-            <a:r>
-              <a:rPr sz="2000" b="0" i="0">
-                <a:solidFill>
-                  <a:srgbClr val="595959"/>
-                </a:solidFill>
-                <a:latin typeface="Arial"/>
-              </a:rPr>
-              <a:t>27 октября 2026</a:t>
             </a:r>
           </a:p>
         </p:txBody>
@@ -6468,7 +6446,7 @@
                 </a:solidFill>
                 <a:latin typeface="Arial"/>
               </a:rPr>
-              <a:t>Лилия Шарф</a:t>
+              <a:t>Шарф Л.</a:t>
             </a:r>
           </a:p>
         </p:txBody>
@@ -6531,7 +6509,7 @@
                 </a:solidFill>
                 <a:latin typeface="Arial"/>
               </a:rPr>
-              <a:t>ЕГЭ информатика · №10. IP-адресация и маска подсети</a:t>
+              <a:t>№10. IP-адресация и маска подсети</a:t>
             </a:r>
           </a:p>
         </p:txBody>
@@ -7277,7 +7255,7 @@
                 </a:solidFill>
                 <a:latin typeface="Arial"/>
               </a:rPr>
-              <a:t>Лилия Шарф</a:t>
+              <a:t>Шарф Л.</a:t>
             </a:r>
           </a:p>
         </p:txBody>
@@ -7340,7 +7318,7 @@
                 </a:solidFill>
                 <a:latin typeface="Arial"/>
               </a:rPr>
-              <a:t>ЕГЭ информатика · №10. IP-адресация и маска подсети</a:t>
+              <a:t>№10. IP-адресация и маска подсети</a:t>
             </a:r>
           </a:p>
         </p:txBody>
@@ -8454,7 +8432,7 @@
                 </a:solidFill>
                 <a:latin typeface="Arial"/>
               </a:rPr>
-              <a:t>Лилия Шарф</a:t>
+              <a:t>Шарф Л.</a:t>
             </a:r>
           </a:p>
         </p:txBody>
@@ -8517,7 +8495,7 @@
                 </a:solidFill>
                 <a:latin typeface="Arial"/>
               </a:rPr>
-              <a:t>ЕГЭ информатика · №10. IP-адресация и маска подсети</a:t>
+              <a:t>№10. IP-адресация и маска подсети</a:t>
             </a:r>
           </a:p>
         </p:txBody>
@@ -10378,7 +10356,7 @@
                 </a:solidFill>
                 <a:latin typeface="Arial"/>
               </a:rPr>
-              <a:t>Лилия Шарф</a:t>
+              <a:t>Шарф Л.</a:t>
             </a:r>
           </a:p>
         </p:txBody>
@@ -10441,7 +10419,7 @@
                 </a:solidFill>
                 <a:latin typeface="Arial"/>
               </a:rPr>
-              <a:t>ЕГЭ информатика · №10. IP-адресация и маска подсети</a:t>
+              <a:t>№10. IP-адресация и маска подсети</a:t>
             </a:r>
           </a:p>
         </p:txBody>
@@ -11564,7 +11542,7 @@
                 </a:solidFill>
                 <a:latin typeface="Arial"/>
               </a:rPr>
-              <a:t>Лилия Шарф</a:t>
+              <a:t>Шарф Л.</a:t>
             </a:r>
           </a:p>
         </p:txBody>
@@ -11627,7 +11605,7 @@
                 </a:solidFill>
                 <a:latin typeface="Arial"/>
               </a:rPr>
-              <a:t>ЕГЭ информатика · №10. IP-адресация и маска подсети</a:t>
+              <a:t>№10. IP-адресация и маска подсети</a:t>
             </a:r>
           </a:p>
         </p:txBody>
@@ -12719,7 +12697,7 @@
                 </a:solidFill>
                 <a:latin typeface="Arial"/>
               </a:rPr>
-              <a:t>Лилия Шарф</a:t>
+              <a:t>Шарф Л.</a:t>
             </a:r>
           </a:p>
         </p:txBody>
@@ -12782,7 +12760,7 @@
                 </a:solidFill>
                 <a:latin typeface="Arial"/>
               </a:rPr>
-              <a:t>ЕГЭ информатика · №10. IP-адресация и маска подсети</a:t>
+              <a:t>№10. IP-адресация и маска подсети</a:t>
             </a:r>
           </a:p>
         </p:txBody>
@@ -14809,7 +14787,7 @@
                 </a:solidFill>
                 <a:latin typeface="Arial"/>
               </a:rPr>
-              <a:t>Лилия Шарф</a:t>
+              <a:t>Шарф Л.</a:t>
             </a:r>
           </a:p>
         </p:txBody>
@@ -14872,7 +14850,7 @@
                 </a:solidFill>
                 <a:latin typeface="Arial"/>
               </a:rPr>
-              <a:t>ЕГЭ информатика · №10. IP-адресация и маска подсети</a:t>
+              <a:t>№10. IP-адресация и маска подсети</a:t>
             </a:r>
           </a:p>
         </p:txBody>
@@ -16401,7 +16379,7 @@
                 </a:solidFill>
                 <a:latin typeface="Arial"/>
               </a:rPr>
-              <a:t>Лилия Шарф</a:t>
+              <a:t>Шарф Л.</a:t>
             </a:r>
           </a:p>
         </p:txBody>
@@ -16464,7 +16442,7 @@
                 </a:solidFill>
                 <a:latin typeface="Arial"/>
               </a:rPr>
-              <a:t>ЕГЭ информатика · №10. IP-адресация и маска подсети</a:t>
+              <a:t>№10. IP-адресация и маска подсети</a:t>
             </a:r>
           </a:p>
         </p:txBody>
@@ -17593,7 +17571,7 @@
                 </a:solidFill>
                 <a:latin typeface="Arial"/>
               </a:rPr>
-              <a:t>Лилия Шарф</a:t>
+              <a:t>Шарф Л.</a:t>
             </a:r>
           </a:p>
         </p:txBody>
@@ -17656,7 +17634,7 @@
                 </a:solidFill>
                 <a:latin typeface="Arial"/>
               </a:rPr>
-              <a:t>ЕГЭ информатика · №10. IP-адресация и маска подсети</a:t>
+              <a:t>№10. IP-адресация и маска подсети</a:t>
             </a:r>
           </a:p>
         </p:txBody>
@@ -18840,7 +18818,7 @@
                 </a:solidFill>
                 <a:latin typeface="Arial"/>
               </a:rPr>
-              <a:t>Лилия Шарф</a:t>
+              <a:t>Шарф Л.</a:t>
             </a:r>
           </a:p>
         </p:txBody>
@@ -18903,7 +18881,7 @@
                 </a:solidFill>
                 <a:latin typeface="Arial"/>
               </a:rPr>
-              <a:t>ЕГЭ информатика · №10. IP-адресация и маска подсети</a:t>
+              <a:t>№10. IP-адресация и маска подсети</a:t>
             </a:r>
           </a:p>
         </p:txBody>
@@ -20645,7 +20623,7 @@
                 </a:solidFill>
                 <a:latin typeface="Arial"/>
               </a:rPr>
-              <a:t>Лилия Шарф</a:t>
+              <a:t>Шарф Л.</a:t>
             </a:r>
           </a:p>
         </p:txBody>
@@ -20708,7 +20686,7 @@
                 </a:solidFill>
                 <a:latin typeface="Arial"/>
               </a:rPr>
-              <a:t>ЕГЭ информатика · №10. IP-адресация и маска подсети</a:t>
+              <a:t>№10. IP-адресация и маска подсети</a:t>
             </a:r>
           </a:p>
         </p:txBody>
@@ -20767,7 +20745,7 @@
         <p:spPr>
           <a:xfrm>
             <a:off x="457200" y="1508760"/>
-            <a:ext cx="2103120" cy="1325880"/>
+            <a:ext cx="2103120" cy="1097280"/>
           </a:xfrm>
           <a:prstGeom prst="roundRect">
             <a:avLst>
@@ -20812,8 +20790,8 @@
         </p:nvSpPr>
         <p:spPr>
           <a:xfrm>
-            <a:off x="457200" y="1618488"/>
-            <a:ext cx="2103120" cy="731520"/>
+            <a:off x="457200" y="1545336"/>
+            <a:ext cx="2103120" cy="640080"/>
           </a:xfrm>
           <a:prstGeom prst="rect">
             <a:avLst/>
@@ -20821,7 +20799,7 @@
           <a:noFill/>
         </p:spPr>
         <p:txBody>
-          <a:bodyPr wrap="square" anchor="t" lIns="73152" rIns="73152" tIns="73152" bIns="73152">
+          <a:bodyPr wrap="square" anchor="ctr" lIns="73152" rIns="73152" tIns="18288" bIns="18288">
             <a:spAutoFit/>
           </a:bodyPr>
           <a:lstStyle/>
@@ -20838,7 +20816,7 @@
               </a:spcAft>
             </a:pPr>
             <a:r>
-              <a:rPr sz="3600" b="1" i="0">
+              <a:rPr sz="3000" b="1" i="0">
                 <a:solidFill>
                   <a:srgbClr val="3333B2"/>
                 </a:solidFill>
@@ -20857,8 +20835,8 @@
         </p:nvSpPr>
         <p:spPr>
           <a:xfrm>
-            <a:off x="457200" y="2331720"/>
-            <a:ext cx="2103120" cy="411480"/>
+            <a:off x="457200" y="2167128"/>
+            <a:ext cx="2103120" cy="384048"/>
           </a:xfrm>
           <a:prstGeom prst="rect">
             <a:avLst/>
@@ -20866,7 +20844,7 @@
           <a:noFill/>
         </p:spPr>
         <p:txBody>
-          <a:bodyPr wrap="square" anchor="t" lIns="73152" rIns="73152" tIns="73152" bIns="73152">
+          <a:bodyPr wrap="square" anchor="ctr" lIns="73152" rIns="73152" tIns="18288" bIns="18288">
             <a:spAutoFit/>
           </a:bodyPr>
           <a:lstStyle/>
@@ -20883,7 +20861,7 @@
               </a:spcAft>
             </a:pPr>
             <a:r>
-              <a:rPr sz="1400" b="0" i="0">
+              <a:rPr sz="1300" b="0" i="0">
                 <a:solidFill>
                   <a:srgbClr val="595959"/>
                 </a:solidFill>
@@ -20902,8 +20880,8 @@
         </p:nvSpPr>
         <p:spPr>
           <a:xfrm>
-            <a:off x="457200" y="3017520"/>
-            <a:ext cx="2103120" cy="1325880"/>
+            <a:off x="457200" y="2743200"/>
+            <a:ext cx="2103120" cy="1097280"/>
           </a:xfrm>
           <a:prstGeom prst="roundRect">
             <a:avLst>
@@ -20948,8 +20926,8 @@
         </p:nvSpPr>
         <p:spPr>
           <a:xfrm>
-            <a:off x="457200" y="3127248"/>
-            <a:ext cx="2103120" cy="731520"/>
+            <a:off x="457200" y="2779776"/>
+            <a:ext cx="2103120" cy="640080"/>
           </a:xfrm>
           <a:prstGeom prst="rect">
             <a:avLst/>
@@ -20957,7 +20935,7 @@
           <a:noFill/>
         </p:spPr>
         <p:txBody>
-          <a:bodyPr wrap="square" anchor="t" lIns="73152" rIns="73152" tIns="73152" bIns="73152">
+          <a:bodyPr wrap="square" anchor="ctr" lIns="73152" rIns="73152" tIns="18288" bIns="18288">
             <a:spAutoFit/>
           </a:bodyPr>
           <a:lstStyle/>
@@ -20974,7 +20952,7 @@
               </a:spcAft>
             </a:pPr>
             <a:r>
-              <a:rPr sz="3600" b="1" i="0">
+              <a:rPr sz="3000" b="1" i="0">
                 <a:solidFill>
                   <a:srgbClr val="3333B2"/>
                 </a:solidFill>
@@ -20993,8 +20971,8 @@
         </p:nvSpPr>
         <p:spPr>
           <a:xfrm>
-            <a:off x="457200" y="3840480"/>
-            <a:ext cx="2103120" cy="411480"/>
+            <a:off x="457200" y="3401568"/>
+            <a:ext cx="2103120" cy="384048"/>
           </a:xfrm>
           <a:prstGeom prst="rect">
             <a:avLst/>
@@ -21002,7 +20980,7 @@
           <a:noFill/>
         </p:spPr>
         <p:txBody>
-          <a:bodyPr wrap="square" anchor="t" lIns="73152" rIns="73152" tIns="73152" bIns="73152">
+          <a:bodyPr wrap="square" anchor="ctr" lIns="73152" rIns="73152" tIns="18288" bIns="18288">
             <a:spAutoFit/>
           </a:bodyPr>
           <a:lstStyle/>
@@ -21019,7 +20997,7 @@
               </a:spcAft>
             </a:pPr>
             <a:r>
-              <a:rPr sz="1400" b="0" i="0">
+              <a:rPr sz="1300" b="0" i="0">
                 <a:solidFill>
                   <a:srgbClr val="595959"/>
                 </a:solidFill>
@@ -21038,8 +21016,8 @@
         </p:nvSpPr>
         <p:spPr>
           <a:xfrm>
-            <a:off x="457200" y="4526279"/>
-            <a:ext cx="2103120" cy="1325880"/>
+            <a:off x="457200" y="3977639"/>
+            <a:ext cx="2103120" cy="1097280"/>
           </a:xfrm>
           <a:prstGeom prst="roundRect">
             <a:avLst>
@@ -21084,8 +21062,8 @@
         </p:nvSpPr>
         <p:spPr>
           <a:xfrm>
-            <a:off x="457200" y="4636007"/>
-            <a:ext cx="2103120" cy="731520"/>
+            <a:off x="457200" y="4014215"/>
+            <a:ext cx="2103120" cy="640080"/>
           </a:xfrm>
           <a:prstGeom prst="rect">
             <a:avLst/>
@@ -21093,7 +21071,7 @@
           <a:noFill/>
         </p:spPr>
         <p:txBody>
-          <a:bodyPr wrap="square" anchor="t" lIns="73152" rIns="73152" tIns="73152" bIns="73152">
+          <a:bodyPr wrap="square" anchor="ctr" lIns="73152" rIns="73152" tIns="18288" bIns="18288">
             <a:spAutoFit/>
           </a:bodyPr>
           <a:lstStyle/>
@@ -21110,7 +21088,7 @@
               </a:spcAft>
             </a:pPr>
             <a:r>
-              <a:rPr sz="3600" b="1" i="0">
+              <a:rPr sz="3000" b="1" i="0">
                 <a:solidFill>
                   <a:srgbClr val="3333B2"/>
                 </a:solidFill>
@@ -21129,8 +21107,8 @@
         </p:nvSpPr>
         <p:spPr>
           <a:xfrm>
-            <a:off x="457200" y="5349240"/>
-            <a:ext cx="2103120" cy="411480"/>
+            <a:off x="457200" y="4636007"/>
+            <a:ext cx="2103120" cy="384048"/>
           </a:xfrm>
           <a:prstGeom prst="rect">
             <a:avLst/>
@@ -21138,7 +21116,7 @@
           <a:noFill/>
         </p:spPr>
         <p:txBody>
-          <a:bodyPr wrap="square" anchor="t" lIns="73152" rIns="73152" tIns="73152" bIns="73152">
+          <a:bodyPr wrap="square" anchor="ctr" lIns="73152" rIns="73152" tIns="18288" bIns="18288">
             <a:spAutoFit/>
           </a:bodyPr>
           <a:lstStyle/>
@@ -21155,7 +21133,7 @@
               </a:spcAft>
             </a:pPr>
             <a:r>
-              <a:rPr sz="1400" b="0" i="0">
+              <a:rPr sz="1300" b="0" i="0">
                 <a:solidFill>
                   <a:srgbClr val="595959"/>
                 </a:solidFill>
@@ -21168,18 +21146,18 @@
       </p:sp>
       <p:sp>
         <p:nvSpPr>
-          <p:cNvPr id="17" name="Блок: Что изменилось в 2027 году"/>
+          <p:cNvPr id="17" name="Число: решили в 2026 (как №13)"/>
           <p:cNvSpPr/>
           <p:nvPr/>
         </p:nvSpPr>
         <p:spPr>
           <a:xfrm>
-            <a:off x="2834640" y="1508760"/>
-            <a:ext cx="8899855" cy="1965960"/>
+            <a:off x="457200" y="5212079"/>
+            <a:ext cx="2103120" cy="1097280"/>
           </a:xfrm>
           <a:prstGeom prst="roundRect">
             <a:avLst>
-              <a:gd name="adj" fmla="val 6000"/>
+              <a:gd name="adj" fmla="val 10000"/>
             </a:avLst>
           </a:prstGeom>
           <a:solidFill>
@@ -21214,7 +21192,143 @@
       </p:sp>
       <p:sp>
         <p:nvSpPr>
-          <p:cNvPr id="18" name="Шапка блока: Что изменилось в 2027 году"/>
+          <p:cNvPr id="18" name="TextBox 17"/>
+          <p:cNvSpPr txBox="1"/>
+          <p:nvPr/>
+        </p:nvSpPr>
+        <p:spPr>
+          <a:xfrm>
+            <a:off x="457200" y="5248655"/>
+            <a:ext cx="2103120" cy="640080"/>
+          </a:xfrm>
+          <a:prstGeom prst="rect">
+            <a:avLst/>
+          </a:prstGeom>
+          <a:noFill/>
+        </p:spPr>
+        <p:txBody>
+          <a:bodyPr wrap="square" anchor="ctr" lIns="73152" rIns="73152" tIns="18288" bIns="18288">
+            <a:spAutoFit/>
+          </a:bodyPr>
+          <a:lstStyle/>
+          <a:p>
+            <a:pPr algn="ctr">
+              <a:lnSpc>
+                <a:spcPct val="100000"/>
+              </a:lnSpc>
+              <a:spcBef>
+                <a:spcPts val="0"/>
+              </a:spcBef>
+              <a:spcAft>
+                <a:spcPts val="400"/>
+              </a:spcAft>
+            </a:pPr>
+            <a:r>
+              <a:rPr sz="3000" b="1" i="0">
+                <a:solidFill>
+                  <a:srgbClr val="3333B2"/>
+                </a:solidFill>
+                <a:latin typeface="Arial"/>
+              </a:rPr>
+              <a:t>52,0 %</a:t>
+            </a:r>
+          </a:p>
+        </p:txBody>
+      </p:sp>
+      <p:sp>
+        <p:nvSpPr>
+          <p:cNvPr id="19" name="TextBox 18"/>
+          <p:cNvSpPr txBox="1"/>
+          <p:nvPr/>
+        </p:nvSpPr>
+        <p:spPr>
+          <a:xfrm>
+            <a:off x="457200" y="5870447"/>
+            <a:ext cx="2103120" cy="384048"/>
+          </a:xfrm>
+          <a:prstGeom prst="rect">
+            <a:avLst/>
+          </a:prstGeom>
+          <a:noFill/>
+        </p:spPr>
+        <p:txBody>
+          <a:bodyPr wrap="square" anchor="ctr" lIns="73152" rIns="73152" tIns="18288" bIns="18288">
+            <a:spAutoFit/>
+          </a:bodyPr>
+          <a:lstStyle/>
+          <a:p>
+            <a:pPr algn="ctr">
+              <a:lnSpc>
+                <a:spcPct val="100000"/>
+              </a:lnSpc>
+              <a:spcBef>
+                <a:spcPts val="0"/>
+              </a:spcBef>
+              <a:spcAft>
+                <a:spcPts val="400"/>
+              </a:spcAft>
+            </a:pPr>
+            <a:r>
+              <a:rPr sz="1300" b="0" i="0">
+                <a:solidFill>
+                  <a:srgbClr val="595959"/>
+                </a:solidFill>
+                <a:latin typeface="Arial"/>
+              </a:rPr>
+              <a:t>решили в 2026 (как №13)</a:t>
+            </a:r>
+          </a:p>
+        </p:txBody>
+      </p:sp>
+      <p:sp>
+        <p:nvSpPr>
+          <p:cNvPr id="20" name="Блок: Что изменилось в 2027 году"/>
+          <p:cNvSpPr/>
+          <p:nvPr/>
+        </p:nvSpPr>
+        <p:spPr>
+          <a:xfrm>
+            <a:off x="2834640" y="1508760"/>
+            <a:ext cx="8899855" cy="1965960"/>
+          </a:xfrm>
+          <a:prstGeom prst="roundRect">
+            <a:avLst>
+              <a:gd name="adj" fmla="val 6000"/>
+            </a:avLst>
+          </a:prstGeom>
+          <a:solidFill>
+            <a:srgbClr val="EBEBF7"/>
+          </a:solidFill>
+          <a:ln>
+            <a:noFill/>
+          </a:ln>
+          <a:effectLst/>
+        </p:spPr>
+        <p:style>
+          <a:lnRef idx="1">
+            <a:schemeClr val="accent1"/>
+          </a:lnRef>
+          <a:fillRef idx="3">
+            <a:schemeClr val="accent1"/>
+          </a:fillRef>
+          <a:effectRef idx="2">
+            <a:schemeClr val="accent1"/>
+          </a:effectRef>
+          <a:fontRef idx="minor">
+            <a:schemeClr val="lt1"/>
+          </a:fontRef>
+        </p:style>
+        <p:txBody>
+          <a:bodyPr rtlCol="0" anchor="ctr"/>
+          <a:lstStyle/>
+          <a:p>
+            <a:pPr algn="ctr"/>
+          </a:p>
+        </p:txBody>
+      </p:sp>
+      <p:sp>
+        <p:nvSpPr>
+          <p:cNvPr id="21" name="Шапка блока: Что изменилось в 2027 году"/>
           <p:cNvSpPr/>
           <p:nvPr/>
         </p:nvSpPr>
@@ -21280,7 +21394,7 @@
       </p:sp>
       <p:sp>
         <p:nvSpPr>
-          <p:cNvPr id="19" name="TextBox 18"/>
+          <p:cNvPr id="22" name="TextBox 21"/>
           <p:cNvSpPr txBox="1"/>
           <p:nvPr/>
         </p:nvSpPr>
@@ -21405,7 +21519,7 @@
       </p:sp>
       <p:sp>
         <p:nvSpPr>
-          <p:cNvPr id="20" name="Блок: Формат ответа: сумма октетов"/>
+          <p:cNvPr id="23" name="Блок: Формат ответа: сумма октетов"/>
           <p:cNvSpPr/>
           <p:nvPr/>
         </p:nvSpPr>
@@ -21451,7 +21565,7 @@
       </p:sp>
       <p:sp>
         <p:nvSpPr>
-          <p:cNvPr id="21" name="Шапка блока: Формат ответа: сумма октетов"/>
+          <p:cNvPr id="24" name="Шапка блока: Формат ответа: сумма октетов"/>
           <p:cNvSpPr/>
           <p:nvPr/>
         </p:nvSpPr>
@@ -21517,7 +21631,7 @@
       </p:sp>
       <p:sp>
         <p:nvSpPr>
-          <p:cNvPr id="22" name="TextBox 21"/>
+          <p:cNvPr id="25" name="TextBox 24"/>
           <p:cNvSpPr txBox="1"/>
           <p:nvPr/>
         </p:nvSpPr>
@@ -21633,7 +21747,7 @@
       </p:sp>
       <p:sp>
         <p:nvSpPr>
-          <p:cNvPr id="23" name="TextBox 22"/>
+          <p:cNvPr id="26" name="TextBox 25"/>
           <p:cNvSpPr txBox="1"/>
           <p:nvPr/>
         </p:nvSpPr>
@@ -21671,7 +21785,7 @@
                 </a:solidFill>
                 <a:latin typeface="Arial"/>
               </a:rPr>
-              <a:t>По проекту демоверсии и спецификации ФИПИ 2027</a:t>
+              <a:t>Проект ФИПИ 2027; процент решивших — методические рекомендации ФИПИ по итогам ЕГЭ 2026</a:t>
             </a:r>
           </a:p>
         </p:txBody>
@@ -22073,7 +22187,7 @@
                 </a:solidFill>
                 <a:latin typeface="Arial"/>
               </a:rPr>
-              <a:t>Лилия Шарф</a:t>
+              <a:t>Шарф Л.</a:t>
             </a:r>
           </a:p>
         </p:txBody>
@@ -22136,7 +22250,7 @@
                 </a:solidFill>
                 <a:latin typeface="Arial"/>
               </a:rPr>
-              <a:t>ЕГЭ информатика · №10. IP-адресация и маска подсети</a:t>
+              <a:t>№10. IP-адресация и маска подсети</a:t>
             </a:r>
           </a:p>
         </p:txBody>
@@ -24013,7 +24127,7 @@
                 </a:solidFill>
                 <a:latin typeface="Arial"/>
               </a:rPr>
-              <a:t>Лилия Шарф</a:t>
+              <a:t>Шарф Л.</a:t>
             </a:r>
           </a:p>
         </p:txBody>
@@ -24076,7 +24190,7 @@
                 </a:solidFill>
                 <a:latin typeface="Arial"/>
               </a:rPr>
-              <a:t>ЕГЭ информатика · №10. IP-адресация и маска подсети</a:t>
+              <a:t>№10. IP-адресация и маска подсети</a:t>
             </a:r>
           </a:p>
         </p:txBody>
@@ -25235,7 +25349,7 @@
                 </a:solidFill>
                 <a:latin typeface="Arial"/>
               </a:rPr>
-              <a:t>Лилия Шарф</a:t>
+              <a:t>Шарф Л.</a:t>
             </a:r>
           </a:p>
         </p:txBody>
@@ -25298,7 +25412,7 @@
                 </a:solidFill>
                 <a:latin typeface="Arial"/>
               </a:rPr>
-              <a:t>ЕГЭ информатика · №10. IP-адресация и маска подсети</a:t>
+              <a:t>№10. IP-адресация и маска подсети</a:t>
             </a:r>
           </a:p>
         </p:txBody>
@@ -26457,7 +26571,7 @@
                 </a:solidFill>
                 <a:latin typeface="Arial"/>
               </a:rPr>
-              <a:t>Лилия Шарф</a:t>
+              <a:t>Шарф Л.</a:t>
             </a:r>
           </a:p>
         </p:txBody>
@@ -26520,7 +26634,7 @@
                 </a:solidFill>
                 <a:latin typeface="Arial"/>
               </a:rPr>
-              <a:t>ЕГЭ информатика · №10. IP-адресация и маска подсети</a:t>
+              <a:t>№10. IP-адресация и маска подсети</a:t>
             </a:r>
           </a:p>
         </p:txBody>
@@ -27894,7 +28008,7 @@
                 </a:solidFill>
                 <a:latin typeface="Arial"/>
               </a:rPr>
-              <a:t>Лилия Шарф</a:t>
+              <a:t>Шарф Л.</a:t>
             </a:r>
           </a:p>
         </p:txBody>
@@ -27957,7 +28071,7 @@
                 </a:solidFill>
                 <a:latin typeface="Arial"/>
               </a:rPr>
-              <a:t>ЕГЭ информатика · №10. IP-адресация и маска подсети</a:t>
+              <a:t>№10. IP-адресация и маска подсети</a:t>
             </a:r>
           </a:p>
         </p:txBody>
@@ -29116,7 +29230,7 @@
                 </a:solidFill>
                 <a:latin typeface="Arial"/>
               </a:rPr>
-              <a:t>Лилия Шарф</a:t>
+              <a:t>Шарф Л.</a:t>
             </a:r>
           </a:p>
         </p:txBody>
@@ -29179,7 +29293,7 @@
                 </a:solidFill>
                 <a:latin typeface="Arial"/>
               </a:rPr>
-              <a:t>ЕГЭ информатика · №10. IP-адресация и маска подсети</a:t>
+              <a:t>№10. IP-адресация и маска подсети</a:t>
             </a:r>
           </a:p>
         </p:txBody>
@@ -30338,7 +30452,7 @@
                 </a:solidFill>
                 <a:latin typeface="Arial"/>
               </a:rPr>
-              <a:t>Лилия Шарф</a:t>
+              <a:t>Шарф Л.</a:t>
             </a:r>
           </a:p>
         </p:txBody>
@@ -30401,7 +30515,7 @@
                 </a:solidFill>
                 <a:latin typeface="Arial"/>
               </a:rPr>
-              <a:t>ЕГЭ информатика · №10. IP-адресация и маска подсети</a:t>
+              <a:t>№10. IP-адресация и маска подсети</a:t>
             </a:r>
           </a:p>
         </p:txBody>
@@ -31775,7 +31889,7 @@
                 </a:solidFill>
                 <a:latin typeface="Arial"/>
               </a:rPr>
-              <a:t>Лилия Шарф</a:t>
+              <a:t>Шарф Л.</a:t>
             </a:r>
           </a:p>
         </p:txBody>
@@ -31838,7 +31952,7 @@
                 </a:solidFill>
                 <a:latin typeface="Arial"/>
               </a:rPr>
-              <a:t>ЕГЭ информатика · №10. IP-адресация и маска подсети</a:t>
+              <a:t>№10. IP-адресация и маска подсети</a:t>
             </a:r>
           </a:p>
         </p:txBody>
@@ -32997,7 +33111,7 @@
                 </a:solidFill>
                 <a:latin typeface="Arial"/>
               </a:rPr>
-              <a:t>Лилия Шарф</a:t>
+              <a:t>Шарф Л.</a:t>
             </a:r>
           </a:p>
         </p:txBody>
@@ -33060,7 +33174,7 @@
                 </a:solidFill>
                 <a:latin typeface="Arial"/>
               </a:rPr>
-              <a:t>ЕГЭ информатика · №10. IP-адресация и маска подсети</a:t>
+              <a:t>№10. IP-адресация и маска подсети</a:t>
             </a:r>
           </a:p>
         </p:txBody>
@@ -34219,7 +34333,7 @@
                 </a:solidFill>
                 <a:latin typeface="Arial"/>
               </a:rPr>
-              <a:t>Лилия Шарф</a:t>
+              <a:t>Шарф Л.</a:t>
             </a:r>
           </a:p>
         </p:txBody>
@@ -34282,7 +34396,7 @@
                 </a:solidFill>
                 <a:latin typeface="Arial"/>
               </a:rPr>
-              <a:t>ЕГЭ информатика · №10. IP-адресация и маска подсети</a:t>
+              <a:t>№10. IP-адресация и маска подсети</a:t>
             </a:r>
           </a:p>
         </p:txBody>
@@ -35507,7 +35621,7 @@
                 </a:solidFill>
                 <a:latin typeface="Arial"/>
               </a:rPr>
-              <a:t>Лилия Шарф</a:t>
+              <a:t>Шарф Л.</a:t>
             </a:r>
           </a:p>
         </p:txBody>
@@ -35570,7 +35684,7 @@
                 </a:solidFill>
                 <a:latin typeface="Arial"/>
               </a:rPr>
-              <a:t>ЕГЭ информатика · №10. IP-адресация и маска подсети</a:t>
+              <a:t>№10. IP-адресация и маска подсети</a:t>
             </a:r>
           </a:p>
         </p:txBody>
@@ -37094,7 +37208,7 @@
                 </a:solidFill>
                 <a:latin typeface="Arial"/>
               </a:rPr>
-              <a:t>Лилия Шарф</a:t>
+              <a:t>Шарф Л.</a:t>
             </a:r>
           </a:p>
         </p:txBody>
@@ -37157,7 +37271,7 @@
                 </a:solidFill>
                 <a:latin typeface="Arial"/>
               </a:rPr>
-              <a:t>ЕГЭ информатика · №10. IP-адресация и маска подсети</a:t>
+              <a:t>№10. IP-адресация и маска подсети</a:t>
             </a:r>
           </a:p>
         </p:txBody>
@@ -38531,7 +38645,7 @@
                 </a:solidFill>
                 <a:latin typeface="Arial"/>
               </a:rPr>
-              <a:t>Лилия Шарф</a:t>
+              <a:t>Шарф Л.</a:t>
             </a:r>
           </a:p>
         </p:txBody>
@@ -38594,7 +38708,7 @@
                 </a:solidFill>
                 <a:latin typeface="Arial"/>
               </a:rPr>
-              <a:t>ЕГЭ информатика · №10. IP-адресация и маска подсети</a:t>
+              <a:t>№10. IP-адресация и маска подсети</a:t>
             </a:r>
           </a:p>
         </p:txBody>
@@ -39753,7 +39867,7 @@
                 </a:solidFill>
                 <a:latin typeface="Arial"/>
               </a:rPr>
-              <a:t>Лилия Шарф</a:t>
+              <a:t>Шарф Л.</a:t>
             </a:r>
           </a:p>
         </p:txBody>
@@ -39816,7 +39930,7 @@
                 </a:solidFill>
                 <a:latin typeface="Arial"/>
               </a:rPr>
-              <a:t>ЕГЭ информатика · №10. IP-адресация и маска подсети</a:t>
+              <a:t>№10. IP-адресация и маска подсети</a:t>
             </a:r>
           </a:p>
         </p:txBody>
@@ -40975,7 +41089,7 @@
                 </a:solidFill>
                 <a:latin typeface="Arial"/>
               </a:rPr>
-              <a:t>Лилия Шарф</a:t>
+              <a:t>Шарф Л.</a:t>
             </a:r>
           </a:p>
         </p:txBody>
@@ -41038,7 +41152,7 @@
                 </a:solidFill>
                 <a:latin typeface="Arial"/>
               </a:rPr>
-              <a:t>ЕГЭ информатика · №10. IP-адресация и маска подсети</a:t>
+              <a:t>№10. IP-адресация и маска подсети</a:t>
             </a:r>
           </a:p>
         </p:txBody>
@@ -42219,7 +42333,7 @@
                 </a:solidFill>
                 <a:latin typeface="Arial"/>
               </a:rPr>
-              <a:t>Лилия Шарф</a:t>
+              <a:t>Шарф Л.</a:t>
             </a:r>
           </a:p>
         </p:txBody>
@@ -42282,7 +42396,7 @@
                 </a:solidFill>
                 <a:latin typeface="Arial"/>
               </a:rPr>
-              <a:t>ЕГЭ информатика · №10. IP-адресация и маска подсети</a:t>
+              <a:t>№10. IP-адресация и маска подсети</a:t>
             </a:r>
           </a:p>
         </p:txBody>
@@ -43463,7 +43577,7 @@
                 </a:solidFill>
                 <a:latin typeface="Arial"/>
               </a:rPr>
-              <a:t>Лилия Шарф</a:t>
+              <a:t>Шарф Л.</a:t>
             </a:r>
           </a:p>
         </p:txBody>
@@ -43526,7 +43640,7 @@
                 </a:solidFill>
                 <a:latin typeface="Arial"/>
               </a:rPr>
-              <a:t>ЕГЭ информатика · №10. IP-адресация и маска подсети</a:t>
+              <a:t>№10. IP-адресация и маска подсети</a:t>
             </a:r>
           </a:p>
         </p:txBody>
@@ -44707,7 +44821,7 @@
                 </a:solidFill>
                 <a:latin typeface="Arial"/>
               </a:rPr>
-              <a:t>Лилия Шарф</a:t>
+              <a:t>Шарф Л.</a:t>
             </a:r>
           </a:p>
         </p:txBody>
@@ -44770,7 +44884,7 @@
                 </a:solidFill>
                 <a:latin typeface="Arial"/>
               </a:rPr>
-              <a:t>ЕГЭ информатика · №10. IP-адресация и маска подсети</a:t>
+              <a:t>№10. IP-адресация и маска подсети</a:t>
             </a:r>
           </a:p>
         </p:txBody>
@@ -45995,7 +46109,7 @@
                 </a:solidFill>
                 <a:latin typeface="Arial"/>
               </a:rPr>
-              <a:t>Лилия Шарф</a:t>
+              <a:t>Шарф Л.</a:t>
             </a:r>
           </a:p>
         </p:txBody>
@@ -46058,7 +46172,7 @@
                 </a:solidFill>
                 <a:latin typeface="Arial"/>
               </a:rPr>
-              <a:t>ЕГЭ информатика · №10. IP-адресация и маска подсети</a:t>
+              <a:t>№10. IP-адресация и маска подсети</a:t>
             </a:r>
           </a:p>
         </p:txBody>
@@ -47701,7 +47815,7 @@
                 </a:solidFill>
                 <a:latin typeface="Arial"/>
               </a:rPr>
-              <a:t>Лилия Шарф</a:t>
+              <a:t>Шарф Л.</a:t>
             </a:r>
           </a:p>
         </p:txBody>
@@ -47764,7 +47878,7 @@
                 </a:solidFill>
                 <a:latin typeface="Arial"/>
               </a:rPr>
-              <a:t>ЕГЭ информатика · №10. IP-адресация и маска подсети</a:t>
+              <a:t>№10. IP-адресация и маска подсети</a:t>
             </a:r>
           </a:p>
         </p:txBody>
@@ -49612,7 +49726,7 @@
                 </a:solidFill>
                 <a:latin typeface="Arial"/>
               </a:rPr>
-              <a:t>Лилия Шарф</a:t>
+              <a:t>Шарф Л.</a:t>
             </a:r>
           </a:p>
         </p:txBody>
@@ -49675,7 +49789,7 @@
                 </a:solidFill>
                 <a:latin typeface="Arial"/>
               </a:rPr>
-              <a:t>ЕГЭ информатика · №10. IP-адресация и маска подсети</a:t>
+              <a:t>№10. IP-адресация и маска подсети</a:t>
             </a:r>
           </a:p>
         </p:txBody>
@@ -50664,7 +50778,7 @@
                 </a:solidFill>
                 <a:latin typeface="Arial"/>
               </a:rPr>
-              <a:t>Лилия Шарф</a:t>
+              <a:t>Шарф Л.</a:t>
             </a:r>
           </a:p>
         </p:txBody>
@@ -50727,7 +50841,7 @@
                 </a:solidFill>
                 <a:latin typeface="Arial"/>
               </a:rPr>
-              <a:t>ЕГЭ информатика · №10. IP-адресация и маска подсети</a:t>
+              <a:t>№10. IP-адресация и маска подсети</a:t>
             </a:r>
           </a:p>
         </p:txBody>
@@ -52039,7 +52153,7 @@
                 </a:solidFill>
                 <a:latin typeface="Arial"/>
               </a:rPr>
-              <a:t>Лилия Шарф</a:t>
+              <a:t>Шарф Л.</a:t>
             </a:r>
           </a:p>
         </p:txBody>
@@ -52102,7 +52216,7 @@
                 </a:solidFill>
                 <a:latin typeface="Arial"/>
               </a:rPr>
-              <a:t>ЕГЭ информатика · №10. IP-адресация и маска подсети</a:t>
+              <a:t>№10. IP-адресация и маска подсети</a:t>
             </a:r>
           </a:p>
         </p:txBody>
@@ -53575,7 +53689,7 @@
                 </a:solidFill>
                 <a:latin typeface="Arial"/>
               </a:rPr>
-              <a:t>Лилия Шарф</a:t>
+              <a:t>Шарф Л.</a:t>
             </a:r>
           </a:p>
         </p:txBody>
@@ -53638,7 +53752,7 @@
                 </a:solidFill>
                 <a:latin typeface="Arial"/>
               </a:rPr>
-              <a:t>ЕГЭ информатика · №10. IP-адресация и маска подсети</a:t>
+              <a:t>№10. IP-адресация и маска подсети</a:t>
             </a:r>
           </a:p>
         </p:txBody>
